--- a/index/designs/y8-l15/l1-shops-nearby/l1-shops-nearby.pptx
+++ b/index/designs/y8-l15/l1-shops-nearby/l1-shops-nearby.pptx
@@ -2983,8 +2983,8 @@
         </p:nvSpPr>
         <p:spPr>
           <a:xfrm>
-            <a:off x="507950" y="176213"/>
-            <a:ext cx="1179219" cy="180975"/>
+            <a:off x="507950" y="180975"/>
+            <a:ext cx="1086618" cy="171450"/>
           </a:xfrm>
           <a:prstGeom prst="rect">
             <a:avLst/>
@@ -3022,8 +3022,8 @@
         </p:nvSpPr>
         <p:spPr>
           <a:xfrm>
-            <a:off x="1949500" y="166688"/>
-            <a:ext cx="1046390" cy="200025"/>
+            <a:off x="1858714" y="166688"/>
+            <a:ext cx="967451" cy="200025"/>
           </a:xfrm>
           <a:prstGeom prst="rect">
             <a:avLst/>
@@ -3061,8 +3061,8 @@
         </p:nvSpPr>
         <p:spPr>
           <a:xfrm>
-            <a:off x="11291292" y="176213"/>
-            <a:ext cx="400613" cy="180975"/>
+            <a:off x="11322397" y="180975"/>
+            <a:ext cx="368885" cy="171450"/>
           </a:xfrm>
           <a:prstGeom prst="rect">
             <a:avLst/>
@@ -7684,7 +7684,7 @@
       </p:sp>
       <p:pic>
         <p:nvPicPr>
-          <p:cNvPr id="10" name="Image 0" descr="/var/folders/6c/210dcgxn4gz5sm71vld2cy1h0000gn/T/tmp.LHO6BoqOp1/img/fujin.png">    </p:cNvPr>
+          <p:cNvPr id="10" name="Image 0" descr="/var/folders/6c/210dcgxn4gz5sm71vld2cy1h0000gn/T/tmp.kuKuqUEQz8/img/fujin.png">    </p:cNvPr>
           <p:cNvPicPr>
             <a:picLocks noChangeAspect="1"/>
           </p:cNvPicPr>
@@ -7783,7 +7783,7 @@
       </p:sp>
       <p:pic>
         <p:nvPicPr>
-          <p:cNvPr id="13" name="Image 1" descr="/var/folders/6c/210dcgxn4gz5sm71vld2cy1h0000gn/T/tmp.LHO6BoqOp1/img/huadian.png">    </p:cNvPr>
+          <p:cNvPr id="13" name="Image 1" descr="/var/folders/6c/210dcgxn4gz5sm71vld2cy1h0000gn/T/tmp.kuKuqUEQz8/img/huadian.png">    </p:cNvPr>
           <p:cNvPicPr>
             <a:picLocks noChangeAspect="1"/>
           </p:cNvPicPr>
@@ -7882,7 +7882,7 @@
       </p:sp>
       <p:pic>
         <p:nvPicPr>
-          <p:cNvPr id="16" name="Image 2" descr="/var/folders/6c/210dcgxn4gz5sm71vld2cy1h0000gn/T/tmp.LHO6BoqOp1/img/wenjudian.png">    </p:cNvPr>
+          <p:cNvPr id="16" name="Image 2" descr="/var/folders/6c/210dcgxn4gz5sm71vld2cy1h0000gn/T/tmp.kuKuqUEQz8/img/wenjudian.png">    </p:cNvPr>
           <p:cNvPicPr>
             <a:picLocks noChangeAspect="1"/>
           </p:cNvPicPr>
@@ -7981,7 +7981,7 @@
       </p:sp>
       <p:pic>
         <p:nvPicPr>
-          <p:cNvPr id="19" name="Image 3" descr="/var/folders/6c/210dcgxn4gz5sm71vld2cy1h0000gn/T/tmp.LHO6BoqOp1/img/jiajudian.png">    </p:cNvPr>
+          <p:cNvPr id="19" name="Image 3" descr="/var/folders/6c/210dcgxn4gz5sm71vld2cy1h0000gn/T/tmp.kuKuqUEQz8/img/jiajudian.png">    </p:cNvPr>
           <p:cNvPicPr>
             <a:picLocks noChangeAspect="1"/>
           </p:cNvPicPr>
@@ -8360,7 +8360,7 @@
       </p:sp>
       <p:pic>
         <p:nvPicPr>
-          <p:cNvPr id="9" name="Image 0" descr="/var/folders/6c/210dcgxn4gz5sm71vld2cy1h0000gn/T/tmp.LHO6BoqOp1/img/jiedao.png">    </p:cNvPr>
+          <p:cNvPr id="9" name="Image 0" descr="/var/folders/6c/210dcgxn4gz5sm71vld2cy1h0000gn/T/tmp.kuKuqUEQz8/img/jiedao.png">    </p:cNvPr>
           <p:cNvPicPr>
             <a:picLocks noChangeAspect="1"/>
           </p:cNvPicPr>
@@ -8743,8 +8743,8 @@
         </p:nvSpPr>
         <p:spPr>
           <a:xfrm>
-            <a:off x="507950" y="176213"/>
-            <a:ext cx="2644893" cy="180975"/>
+            <a:off x="507950" y="180975"/>
+            <a:ext cx="2386370" cy="171450"/>
           </a:xfrm>
           <a:prstGeom prst="rect">
             <a:avLst/>
@@ -8782,8 +8782,8 @@
         </p:nvSpPr>
         <p:spPr>
           <a:xfrm>
-            <a:off x="3386435" y="166688"/>
-            <a:ext cx="1296260" cy="200025"/>
+            <a:off x="3132981" y="166688"/>
+            <a:ext cx="1206392" cy="200025"/>
           </a:xfrm>
           <a:prstGeom prst="rect">
             <a:avLst/>
@@ -8821,8 +8821,8 @@
         </p:nvSpPr>
         <p:spPr>
           <a:xfrm>
-            <a:off x="11207948" y="176213"/>
-            <a:ext cx="485623" cy="180975"/>
+            <a:off x="11244709" y="180975"/>
+            <a:ext cx="448127" cy="171450"/>
           </a:xfrm>
           <a:prstGeom prst="rect">
             <a:avLst/>
@@ -10100,8 +10100,8 @@
         </p:nvSpPr>
         <p:spPr>
           <a:xfrm>
-            <a:off x="507950" y="176213"/>
-            <a:ext cx="1468407" cy="180975"/>
+            <a:off x="507950" y="180975"/>
+            <a:ext cx="1325103" cy="171450"/>
           </a:xfrm>
           <a:prstGeom prst="rect">
             <a:avLst/>
@@ -10139,8 +10139,8 @@
         </p:nvSpPr>
         <p:spPr>
           <a:xfrm>
-            <a:off x="2233017" y="166688"/>
-            <a:ext cx="1046390" cy="200025"/>
+            <a:off x="2092523" y="166688"/>
+            <a:ext cx="967451" cy="200025"/>
           </a:xfrm>
           <a:prstGeom prst="rect">
             <a:avLst/>
@@ -10178,8 +10178,8 @@
         </p:nvSpPr>
         <p:spPr>
           <a:xfrm>
-            <a:off x="11266140" y="176213"/>
-            <a:ext cx="426268" cy="180975"/>
+            <a:off x="11322397" y="180975"/>
+            <a:ext cx="368885" cy="171450"/>
           </a:xfrm>
           <a:prstGeom prst="rect">
             <a:avLst/>
@@ -10247,7 +10247,7 @@
         </p:nvSpPr>
         <p:spPr>
           <a:xfrm>
-            <a:off x="609600" y="964406"/>
+            <a:off x="609600" y="940594"/>
             <a:ext cx="11192256" cy="200025"/>
           </a:xfrm>
           <a:prstGeom prst="rect">
@@ -10286,12 +10286,12 @@
         </p:nvSpPr>
         <p:spPr>
           <a:xfrm>
-            <a:off x="609600" y="1164431"/>
-            <a:ext cx="10972800" cy="823913"/>
+            <a:off x="609600" y="1140619"/>
+            <a:ext cx="10972800" cy="833438"/>
           </a:xfrm>
           <a:prstGeom prst="roundRect">
             <a:avLst>
-              <a:gd name="adj" fmla="val 7707"/>
+              <a:gd name="adj" fmla="val 7619"/>
             </a:avLst>
           </a:prstGeom>
           <a:solidFill>
@@ -10322,7 +10322,7 @@
         </p:nvSpPr>
         <p:spPr>
           <a:xfrm>
-            <a:off x="796826" y="1275457"/>
+            <a:off x="796826" y="1251645"/>
             <a:ext cx="246075" cy="289471"/>
           </a:xfrm>
           <a:prstGeom prst="rect">
@@ -10364,8 +10364,8 @@
         </p:nvSpPr>
         <p:spPr>
           <a:xfrm>
-            <a:off x="1203127" y="1275457"/>
-            <a:ext cx="1559945" cy="284411"/>
+            <a:off x="1203127" y="1251645"/>
+            <a:ext cx="1561008" cy="284411"/>
           </a:xfrm>
           <a:prstGeom prst="rect">
             <a:avLst/>
@@ -10417,8 +10417,8 @@
         </p:nvSpPr>
         <p:spPr>
           <a:xfrm>
-            <a:off x="1203127" y="1610618"/>
-            <a:ext cx="1559945" cy="266700"/>
+            <a:off x="1203127" y="1586805"/>
+            <a:ext cx="1561008" cy="276225"/>
           </a:xfrm>
           <a:prstGeom prst="rect">
             <a:avLst/>
@@ -10459,12 +10459,12 @@
         </p:nvSpPr>
         <p:spPr>
           <a:xfrm>
-            <a:off x="609600" y="2064544"/>
-            <a:ext cx="10972800" cy="823913"/>
+            <a:off x="609600" y="2050256"/>
+            <a:ext cx="10972800" cy="833438"/>
           </a:xfrm>
           <a:prstGeom prst="roundRect">
             <a:avLst>
-              <a:gd name="adj" fmla="val 7707"/>
+              <a:gd name="adj" fmla="val 7619"/>
             </a:avLst>
           </a:prstGeom>
           <a:solidFill>
@@ -10495,7 +10495,7 @@
         </p:nvSpPr>
         <p:spPr>
           <a:xfrm>
-            <a:off x="796826" y="2175570"/>
+            <a:off x="796826" y="2161282"/>
             <a:ext cx="246075" cy="289471"/>
           </a:xfrm>
           <a:prstGeom prst="rect">
@@ -10537,8 +10537,8 @@
         </p:nvSpPr>
         <p:spPr>
           <a:xfrm>
-            <a:off x="1203127" y="2175570"/>
-            <a:ext cx="1595164" cy="284411"/>
+            <a:off x="1203127" y="2161282"/>
+            <a:ext cx="1579680" cy="284411"/>
           </a:xfrm>
           <a:prstGeom prst="rect">
             <a:avLst/>
@@ -10590,8 +10590,8 @@
         </p:nvSpPr>
         <p:spPr>
           <a:xfrm>
-            <a:off x="1203127" y="2510730"/>
-            <a:ext cx="1595164" cy="266700"/>
+            <a:off x="1203127" y="2496443"/>
+            <a:ext cx="1579680" cy="276225"/>
           </a:xfrm>
           <a:prstGeom prst="rect">
             <a:avLst/>
@@ -10632,12 +10632,12 @@
         </p:nvSpPr>
         <p:spPr>
           <a:xfrm>
-            <a:off x="609600" y="2964656"/>
-            <a:ext cx="10972800" cy="823913"/>
+            <a:off x="609600" y="2959894"/>
+            <a:ext cx="10972800" cy="833438"/>
           </a:xfrm>
           <a:prstGeom prst="roundRect">
             <a:avLst>
-              <a:gd name="adj" fmla="val 7707"/>
+              <a:gd name="adj" fmla="val 7619"/>
             </a:avLst>
           </a:prstGeom>
           <a:solidFill>
@@ -10668,7 +10668,7 @@
         </p:nvSpPr>
         <p:spPr>
           <a:xfrm>
-            <a:off x="796826" y="3075682"/>
+            <a:off x="796826" y="3070920"/>
             <a:ext cx="246075" cy="289471"/>
           </a:xfrm>
           <a:prstGeom prst="rect">
@@ -10710,8 +10710,8 @@
         </p:nvSpPr>
         <p:spPr>
           <a:xfrm>
-            <a:off x="1203127" y="3075682"/>
-            <a:ext cx="2338703" cy="284411"/>
+            <a:off x="1203127" y="3070920"/>
+            <a:ext cx="2327166" cy="284411"/>
           </a:xfrm>
           <a:prstGeom prst="rect">
             <a:avLst/>
@@ -10763,8 +10763,8 @@
         </p:nvSpPr>
         <p:spPr>
           <a:xfrm>
-            <a:off x="1203127" y="3410843"/>
-            <a:ext cx="2338703" cy="266700"/>
+            <a:off x="1203127" y="3406080"/>
+            <a:ext cx="2327166" cy="276225"/>
           </a:xfrm>
           <a:prstGeom prst="rect">
             <a:avLst/>
@@ -10805,12 +10805,12 @@
         </p:nvSpPr>
         <p:spPr>
           <a:xfrm>
-            <a:off x="609600" y="3864769"/>
-            <a:ext cx="10972800" cy="823913"/>
+            <a:off x="609600" y="3869531"/>
+            <a:ext cx="10972800" cy="833438"/>
           </a:xfrm>
           <a:prstGeom prst="roundRect">
             <a:avLst>
-              <a:gd name="adj" fmla="val 7707"/>
+              <a:gd name="adj" fmla="val 7619"/>
             </a:avLst>
           </a:prstGeom>
           <a:solidFill>
@@ -10841,7 +10841,7 @@
         </p:nvSpPr>
         <p:spPr>
           <a:xfrm>
-            <a:off x="796826" y="3975795"/>
+            <a:off x="796826" y="3980557"/>
             <a:ext cx="246075" cy="289471"/>
           </a:xfrm>
           <a:prstGeom prst="rect">
@@ -10883,8 +10883,8 @@
         </p:nvSpPr>
         <p:spPr>
           <a:xfrm>
-            <a:off x="1203127" y="3975795"/>
-            <a:ext cx="2474265" cy="284411"/>
+            <a:off x="1203127" y="3980557"/>
+            <a:ext cx="2378779" cy="284411"/>
           </a:xfrm>
           <a:prstGeom prst="rect">
             <a:avLst/>
@@ -10936,8 +10936,8 @@
         </p:nvSpPr>
         <p:spPr>
           <a:xfrm>
-            <a:off x="1203127" y="4310955"/>
-            <a:ext cx="2474265" cy="266700"/>
+            <a:off x="1203127" y="4315718"/>
+            <a:ext cx="2378779" cy="276225"/>
           </a:xfrm>
           <a:prstGeom prst="rect">
             <a:avLst/>
@@ -10978,12 +10978,12 @@
         </p:nvSpPr>
         <p:spPr>
           <a:xfrm>
-            <a:off x="609600" y="4764881"/>
-            <a:ext cx="10972800" cy="823913"/>
+            <a:off x="609600" y="4779169"/>
+            <a:ext cx="10972800" cy="833438"/>
           </a:xfrm>
           <a:prstGeom prst="roundRect">
             <a:avLst>
-              <a:gd name="adj" fmla="val 7707"/>
+              <a:gd name="adj" fmla="val 7619"/>
             </a:avLst>
           </a:prstGeom>
           <a:solidFill>
@@ -11014,7 +11014,7 @@
         </p:nvSpPr>
         <p:spPr>
           <a:xfrm>
-            <a:off x="796826" y="4875907"/>
+            <a:off x="796826" y="4890195"/>
             <a:ext cx="246075" cy="289471"/>
           </a:xfrm>
           <a:prstGeom prst="rect">
@@ -11056,8 +11056,8 @@
         </p:nvSpPr>
         <p:spPr>
           <a:xfrm>
-            <a:off x="1203127" y="4875907"/>
-            <a:ext cx="3385396" cy="284411"/>
+            <a:off x="1203127" y="4890195"/>
+            <a:ext cx="3302966" cy="284411"/>
           </a:xfrm>
           <a:prstGeom prst="rect">
             <a:avLst/>
@@ -11109,8 +11109,8 @@
         </p:nvSpPr>
         <p:spPr>
           <a:xfrm>
-            <a:off x="1203127" y="5211068"/>
-            <a:ext cx="3385396" cy="266700"/>
+            <a:off x="1203127" y="5225355"/>
+            <a:ext cx="3302966" cy="276225"/>
           </a:xfrm>
           <a:prstGeom prst="rect">
             <a:avLst/>
@@ -11151,7 +11151,7 @@
         </p:nvSpPr>
         <p:spPr>
           <a:xfrm>
-            <a:off x="609600" y="5690295"/>
+            <a:off x="609600" y="5714107"/>
             <a:ext cx="11192256" cy="228600"/>
           </a:xfrm>
           <a:prstGeom prst="rect">
@@ -11836,8 +11836,8 @@
         </p:nvSpPr>
         <p:spPr>
           <a:xfrm>
-            <a:off x="507950" y="180975"/>
-            <a:ext cx="2386370" cy="171450"/>
+            <a:off x="507950" y="176213"/>
+            <a:ext cx="2644893" cy="180975"/>
           </a:xfrm>
           <a:prstGeom prst="rect">
             <a:avLst/>
@@ -11875,8 +11875,8 @@
         </p:nvSpPr>
         <p:spPr>
           <a:xfrm>
-            <a:off x="3132981" y="166688"/>
-            <a:ext cx="825058" cy="200025"/>
+            <a:off x="3386435" y="166688"/>
+            <a:ext cx="901113" cy="200025"/>
           </a:xfrm>
           <a:prstGeom prst="rect">
             <a:avLst/>
@@ -11914,8 +11914,8 @@
         </p:nvSpPr>
         <p:spPr>
           <a:xfrm>
-            <a:off x="11244709" y="180975"/>
-            <a:ext cx="448127" cy="171450"/>
+            <a:off x="11208395" y="176213"/>
+            <a:ext cx="485168" cy="180975"/>
           </a:xfrm>
           <a:prstGeom prst="rect">
             <a:avLst/>
@@ -11983,7 +11983,7 @@
         </p:nvSpPr>
         <p:spPr>
           <a:xfrm>
-            <a:off x="609600" y="1868835"/>
+            <a:off x="609600" y="1864072"/>
             <a:ext cx="11192256" cy="200025"/>
           </a:xfrm>
           <a:prstGeom prst="rect">
@@ -12022,7 +12022,7 @@
         </p:nvSpPr>
         <p:spPr>
           <a:xfrm>
-            <a:off x="609600" y="2068860"/>
+            <a:off x="609600" y="2064097"/>
             <a:ext cx="10972800" cy="1531590"/>
           </a:xfrm>
           <a:prstGeom prst="roundRect">
@@ -12058,7 +12058,7 @@
         </p:nvSpPr>
         <p:spPr>
           <a:xfrm>
-            <a:off x="933450" y="2316510"/>
+            <a:off x="933450" y="2311747"/>
             <a:ext cx="10531602" cy="345430"/>
           </a:xfrm>
           <a:prstGeom prst="rect">
@@ -12100,7 +12100,7 @@
         </p:nvSpPr>
         <p:spPr>
           <a:xfrm>
-            <a:off x="933450" y="2661940"/>
+            <a:off x="933450" y="2657177"/>
             <a:ext cx="10531602" cy="345430"/>
           </a:xfrm>
           <a:prstGeom prst="rect">
@@ -12164,7 +12164,7 @@
         </p:nvSpPr>
         <p:spPr>
           <a:xfrm>
-            <a:off x="933450" y="3007370"/>
+            <a:off x="933450" y="3002607"/>
             <a:ext cx="10531602" cy="345430"/>
           </a:xfrm>
           <a:prstGeom prst="rect">
@@ -12206,12 +12206,12 @@
         </p:nvSpPr>
         <p:spPr>
           <a:xfrm>
-            <a:off x="609600" y="3778151"/>
-            <a:ext cx="10972800" cy="1236464"/>
+            <a:off x="609600" y="3773388"/>
+            <a:ext cx="10972800" cy="1245989"/>
           </a:xfrm>
           <a:prstGeom prst="roundRect">
             <a:avLst>
-              <a:gd name="adj" fmla="val 5136"/>
+              <a:gd name="adj" fmla="val 5096"/>
             </a:avLst>
           </a:prstGeom>
           <a:solidFill>
@@ -12244,8 +12244,8 @@
         </p:nvSpPr>
         <p:spPr>
           <a:xfrm>
-            <a:off x="857250" y="3974902"/>
-            <a:ext cx="10687050" cy="190500"/>
+            <a:off x="857250" y="3970139"/>
+            <a:ext cx="10687050" cy="200025"/>
           </a:xfrm>
           <a:prstGeom prst="rect">
             <a:avLst/>
@@ -12286,7 +12286,7 @@
         </p:nvSpPr>
         <p:spPr>
           <a:xfrm>
-            <a:off x="857250" y="4228802"/>
+            <a:off x="857250" y="4233565"/>
             <a:ext cx="10687050" cy="589062"/>
           </a:xfrm>
           <a:prstGeom prst="rect">
@@ -12435,8 +12435,8 @@
         </p:nvSpPr>
         <p:spPr>
           <a:xfrm>
-            <a:off x="507950" y="176213"/>
-            <a:ext cx="2644893" cy="180975"/>
+            <a:off x="507950" y="180975"/>
+            <a:ext cx="2386370" cy="171450"/>
           </a:xfrm>
           <a:prstGeom prst="rect">
             <a:avLst/>
@@ -12474,8 +12474,8 @@
         </p:nvSpPr>
         <p:spPr>
           <a:xfrm>
-            <a:off x="3386435" y="166688"/>
-            <a:ext cx="1191667" cy="200025"/>
+            <a:off x="3132981" y="166688"/>
+            <a:ext cx="1109844" cy="200025"/>
           </a:xfrm>
           <a:prstGeom prst="rect">
             <a:avLst/>
@@ -12513,8 +12513,8 @@
         </p:nvSpPr>
         <p:spPr>
           <a:xfrm>
-            <a:off x="11183243" y="176213"/>
-            <a:ext cx="510823" cy="180975"/>
+            <a:off x="11244709" y="180975"/>
+            <a:ext cx="448127" cy="171450"/>
           </a:xfrm>
           <a:prstGeom prst="rect">
             <a:avLst/>
@@ -12582,7 +12582,7 @@
         </p:nvSpPr>
         <p:spPr>
           <a:xfrm>
-            <a:off x="609600" y="1179761"/>
+            <a:off x="609600" y="1155948"/>
             <a:ext cx="11192256" cy="200025"/>
           </a:xfrm>
           <a:prstGeom prst="rect">
@@ -12621,12 +12621,12 @@
         </p:nvSpPr>
         <p:spPr>
           <a:xfrm>
-            <a:off x="609600" y="1379786"/>
-            <a:ext cx="10972800" cy="742950"/>
+            <a:off x="609600" y="1355973"/>
+            <a:ext cx="10972800" cy="752475"/>
           </a:xfrm>
           <a:prstGeom prst="roundRect">
             <a:avLst>
-              <a:gd name="adj" fmla="val 8547"/>
+              <a:gd name="adj" fmla="val 8439"/>
             </a:avLst>
           </a:prstGeom>
           <a:solidFill>
@@ -12657,8 +12657,8 @@
         </p:nvSpPr>
         <p:spPr>
           <a:xfrm>
-            <a:off x="822275" y="1465511"/>
-            <a:ext cx="569875" cy="571500"/>
+            <a:off x="822275" y="1441698"/>
+            <a:ext cx="569875" cy="581025"/>
           </a:xfrm>
           <a:prstGeom prst="rect">
             <a:avLst/>
@@ -12696,8 +12696,8 @@
         </p:nvSpPr>
         <p:spPr>
           <a:xfrm>
-            <a:off x="1609576" y="1617911"/>
-            <a:ext cx="751281" cy="266700"/>
+            <a:off x="1609576" y="1594098"/>
+            <a:ext cx="751281" cy="276225"/>
           </a:xfrm>
           <a:prstGeom prst="rect">
             <a:avLst/>
@@ -12735,8 +12735,8 @@
         </p:nvSpPr>
         <p:spPr>
           <a:xfrm>
-            <a:off x="2574727" y="1617911"/>
-            <a:ext cx="3168164" cy="266700"/>
+            <a:off x="2574727" y="1594098"/>
+            <a:ext cx="3011805" cy="276225"/>
           </a:xfrm>
           <a:prstGeom prst="rect">
             <a:avLst/>
@@ -12774,7 +12774,7 @@
         </p:nvSpPr>
         <p:spPr>
           <a:xfrm>
-            <a:off x="9991874" y="1551236"/>
+            <a:off x="9991874" y="1532186"/>
             <a:ext cx="400050" cy="400050"/>
           </a:xfrm>
           <a:prstGeom prst="roundRect">
@@ -12810,7 +12810,7 @@
         </p:nvSpPr>
         <p:spPr>
           <a:xfrm>
-            <a:off x="10480774" y="1551236"/>
+            <a:off x="10480774" y="1532186"/>
             <a:ext cx="400050" cy="400050"/>
           </a:xfrm>
           <a:prstGeom prst="roundRect">
@@ -12846,7 +12846,7 @@
         </p:nvSpPr>
         <p:spPr>
           <a:xfrm>
-            <a:off x="10969675" y="1551236"/>
+            <a:off x="10969675" y="1532186"/>
             <a:ext cx="400050" cy="400050"/>
           </a:xfrm>
           <a:prstGeom prst="roundRect">
@@ -12882,12 +12882,12 @@
         </p:nvSpPr>
         <p:spPr>
           <a:xfrm>
-            <a:off x="609600" y="2186136"/>
-            <a:ext cx="10972800" cy="742950"/>
+            <a:off x="609600" y="2171849"/>
+            <a:ext cx="10972800" cy="752475"/>
           </a:xfrm>
           <a:prstGeom prst="roundRect">
             <a:avLst>
-              <a:gd name="adj" fmla="val 8547"/>
+              <a:gd name="adj" fmla="val 8439"/>
             </a:avLst>
           </a:prstGeom>
           <a:solidFill>
@@ -12918,8 +12918,8 @@
         </p:nvSpPr>
         <p:spPr>
           <a:xfrm>
-            <a:off x="822275" y="2271861"/>
-            <a:ext cx="569875" cy="571500"/>
+            <a:off x="822275" y="2257574"/>
+            <a:ext cx="569875" cy="581025"/>
           </a:xfrm>
           <a:prstGeom prst="rect">
             <a:avLst/>
@@ -12957,8 +12957,8 @@
         </p:nvSpPr>
         <p:spPr>
           <a:xfrm>
-            <a:off x="1609576" y="2424261"/>
-            <a:ext cx="751281" cy="266700"/>
+            <a:off x="1609576" y="2409974"/>
+            <a:ext cx="751281" cy="276225"/>
           </a:xfrm>
           <a:prstGeom prst="rect">
             <a:avLst/>
@@ -12996,8 +12996,8 @@
         </p:nvSpPr>
         <p:spPr>
           <a:xfrm>
-            <a:off x="2574727" y="2424261"/>
-            <a:ext cx="2376047" cy="266700"/>
+            <a:off x="2574727" y="2409974"/>
+            <a:ext cx="2234565" cy="276225"/>
           </a:xfrm>
           <a:prstGeom prst="rect">
             <a:avLst/>
@@ -13035,7 +13035,7 @@
         </p:nvSpPr>
         <p:spPr>
           <a:xfrm>
-            <a:off x="9991874" y="2357586"/>
+            <a:off x="9991874" y="2348061"/>
             <a:ext cx="400050" cy="400050"/>
           </a:xfrm>
           <a:prstGeom prst="roundRect">
@@ -13071,7 +13071,7 @@
         </p:nvSpPr>
         <p:spPr>
           <a:xfrm>
-            <a:off x="10480774" y="2357586"/>
+            <a:off x="10480774" y="2348061"/>
             <a:ext cx="400050" cy="400050"/>
           </a:xfrm>
           <a:prstGeom prst="roundRect">
@@ -13107,7 +13107,7 @@
         </p:nvSpPr>
         <p:spPr>
           <a:xfrm>
-            <a:off x="10969675" y="2357586"/>
+            <a:off x="10969675" y="2348061"/>
             <a:ext cx="400050" cy="400050"/>
           </a:xfrm>
           <a:prstGeom prst="roundRect">
@@ -13143,12 +13143,12 @@
         </p:nvSpPr>
         <p:spPr>
           <a:xfrm>
-            <a:off x="609600" y="2992487"/>
-            <a:ext cx="10972800" cy="742950"/>
+            <a:off x="609600" y="2987725"/>
+            <a:ext cx="10972800" cy="752475"/>
           </a:xfrm>
           <a:prstGeom prst="roundRect">
             <a:avLst>
-              <a:gd name="adj" fmla="val 8547"/>
+              <a:gd name="adj" fmla="val 8439"/>
             </a:avLst>
           </a:prstGeom>
           <a:solidFill>
@@ -13179,8 +13179,8 @@
         </p:nvSpPr>
         <p:spPr>
           <a:xfrm>
-            <a:off x="822275" y="3078212"/>
-            <a:ext cx="569875" cy="571500"/>
+            <a:off x="822275" y="3073450"/>
+            <a:ext cx="569875" cy="581025"/>
           </a:xfrm>
           <a:prstGeom prst="rect">
             <a:avLst/>
@@ -13218,8 +13218,8 @@
         </p:nvSpPr>
         <p:spPr>
           <a:xfrm>
-            <a:off x="1609576" y="3230612"/>
-            <a:ext cx="751281" cy="266700"/>
+            <a:off x="1609576" y="3225850"/>
+            <a:ext cx="751281" cy="276225"/>
           </a:xfrm>
           <a:prstGeom prst="rect">
             <a:avLst/>
@@ -13257,8 +13257,8 @@
         </p:nvSpPr>
         <p:spPr>
           <a:xfrm>
-            <a:off x="2574727" y="3230612"/>
-            <a:ext cx="2376047" cy="266700"/>
+            <a:off x="2574727" y="3225850"/>
+            <a:ext cx="2331720" cy="276225"/>
           </a:xfrm>
           <a:prstGeom prst="rect">
             <a:avLst/>
@@ -13404,12 +13404,12 @@
         </p:nvSpPr>
         <p:spPr>
           <a:xfrm>
-            <a:off x="609600" y="3798838"/>
-            <a:ext cx="10972800" cy="742950"/>
+            <a:off x="609600" y="3803600"/>
+            <a:ext cx="10972800" cy="752475"/>
           </a:xfrm>
           <a:prstGeom prst="roundRect">
             <a:avLst>
-              <a:gd name="adj" fmla="val 8547"/>
+              <a:gd name="adj" fmla="val 8439"/>
             </a:avLst>
           </a:prstGeom>
           <a:solidFill>
@@ -13440,8 +13440,8 @@
         </p:nvSpPr>
         <p:spPr>
           <a:xfrm>
-            <a:off x="822275" y="3884563"/>
-            <a:ext cx="569875" cy="571500"/>
+            <a:off x="822275" y="3889325"/>
+            <a:ext cx="569875" cy="581025"/>
           </a:xfrm>
           <a:prstGeom prst="rect">
             <a:avLst/>
@@ -13479,8 +13479,8 @@
         </p:nvSpPr>
         <p:spPr>
           <a:xfrm>
-            <a:off x="1609576" y="4036963"/>
-            <a:ext cx="751281" cy="266700"/>
+            <a:off x="1609576" y="4041725"/>
+            <a:ext cx="751281" cy="276225"/>
           </a:xfrm>
           <a:prstGeom prst="rect">
             <a:avLst/>
@@ -13518,8 +13518,8 @@
         </p:nvSpPr>
         <p:spPr>
           <a:xfrm>
-            <a:off x="2574727" y="4036963"/>
-            <a:ext cx="1980140" cy="266700"/>
+            <a:off x="2574727" y="4041725"/>
+            <a:ext cx="1943100" cy="276225"/>
           </a:xfrm>
           <a:prstGeom prst="rect">
             <a:avLst/>
@@ -13557,7 +13557,7 @@
         </p:nvSpPr>
         <p:spPr>
           <a:xfrm>
-            <a:off x="9991874" y="3970288"/>
+            <a:off x="9991874" y="3979813"/>
             <a:ext cx="400050" cy="400050"/>
           </a:xfrm>
           <a:prstGeom prst="roundRect">
@@ -13593,7 +13593,7 @@
         </p:nvSpPr>
         <p:spPr>
           <a:xfrm>
-            <a:off x="10480774" y="3970288"/>
+            <a:off x="10480774" y="3979813"/>
             <a:ext cx="400050" cy="400050"/>
           </a:xfrm>
           <a:prstGeom prst="roundRect">
@@ -13629,7 +13629,7 @@
         </p:nvSpPr>
         <p:spPr>
           <a:xfrm>
-            <a:off x="10969675" y="3970288"/>
+            <a:off x="10969675" y="3979813"/>
             <a:ext cx="400050" cy="400050"/>
           </a:xfrm>
           <a:prstGeom prst="roundRect">
@@ -13665,12 +13665,12 @@
         </p:nvSpPr>
         <p:spPr>
           <a:xfrm>
-            <a:off x="609600" y="4605189"/>
-            <a:ext cx="10972800" cy="742950"/>
+            <a:off x="609600" y="4619476"/>
+            <a:ext cx="10972800" cy="752475"/>
           </a:xfrm>
           <a:prstGeom prst="roundRect">
             <a:avLst>
-              <a:gd name="adj" fmla="val 8547"/>
+              <a:gd name="adj" fmla="val 8439"/>
             </a:avLst>
           </a:prstGeom>
           <a:solidFill>
@@ -13701,8 +13701,8 @@
         </p:nvSpPr>
         <p:spPr>
           <a:xfrm>
-            <a:off x="822275" y="4690914"/>
-            <a:ext cx="569875" cy="571500"/>
+            <a:off x="822275" y="4705201"/>
+            <a:ext cx="569875" cy="581025"/>
           </a:xfrm>
           <a:prstGeom prst="rect">
             <a:avLst/>
@@ -13740,8 +13740,8 @@
         </p:nvSpPr>
         <p:spPr>
           <a:xfrm>
-            <a:off x="1609576" y="4843314"/>
-            <a:ext cx="751281" cy="266700"/>
+            <a:off x="1609576" y="4857601"/>
+            <a:ext cx="751281" cy="276225"/>
           </a:xfrm>
           <a:prstGeom prst="rect">
             <a:avLst/>
@@ -13779,8 +13779,8 @@
         </p:nvSpPr>
         <p:spPr>
           <a:xfrm>
-            <a:off x="2574727" y="4843314"/>
-            <a:ext cx="1980140" cy="266700"/>
+            <a:off x="2574727" y="4857601"/>
+            <a:ext cx="1943100" cy="276225"/>
           </a:xfrm>
           <a:prstGeom prst="rect">
             <a:avLst/>
@@ -13818,7 +13818,7 @@
         </p:nvSpPr>
         <p:spPr>
           <a:xfrm>
-            <a:off x="9991874" y="4776639"/>
+            <a:off x="9991874" y="4795689"/>
             <a:ext cx="400050" cy="400050"/>
           </a:xfrm>
           <a:prstGeom prst="roundRect">
@@ -13854,7 +13854,7 @@
         </p:nvSpPr>
         <p:spPr>
           <a:xfrm>
-            <a:off x="10480774" y="4776639"/>
+            <a:off x="10480774" y="4795689"/>
             <a:ext cx="400050" cy="400050"/>
           </a:xfrm>
           <a:prstGeom prst="roundRect">
@@ -13890,7 +13890,7 @@
         </p:nvSpPr>
         <p:spPr>
           <a:xfrm>
-            <a:off x="10969675" y="4776639"/>
+            <a:off x="10969675" y="4795689"/>
             <a:ext cx="400050" cy="400050"/>
           </a:xfrm>
           <a:prstGeom prst="roundRect">
@@ -13926,7 +13926,7 @@
         </p:nvSpPr>
         <p:spPr>
           <a:xfrm>
-            <a:off x="609600" y="5475089"/>
+            <a:off x="609600" y="5498902"/>
             <a:ext cx="11192256" cy="228600"/>
           </a:xfrm>
           <a:prstGeom prst="rect">
@@ -15419,8 +15419,8 @@
         </p:nvSpPr>
         <p:spPr>
           <a:xfrm>
-            <a:off x="507950" y="180975"/>
-            <a:ext cx="1325103" cy="171450"/>
+            <a:off x="507950" y="176213"/>
+            <a:ext cx="1468407" cy="180975"/>
           </a:xfrm>
           <a:prstGeom prst="rect">
             <a:avLst/>
@@ -15458,8 +15458,8 @@
         </p:nvSpPr>
         <p:spPr>
           <a:xfrm>
-            <a:off x="2092523" y="166688"/>
-            <a:ext cx="1394781" cy="200025"/>
+            <a:off x="2233017" y="166688"/>
+            <a:ext cx="1482221" cy="200025"/>
           </a:xfrm>
           <a:prstGeom prst="rect">
             <a:avLst/>
@@ -15497,8 +15497,8 @@
         </p:nvSpPr>
         <p:spPr>
           <a:xfrm>
-            <a:off x="11322397" y="180975"/>
-            <a:ext cx="368885" cy="171450"/>
+            <a:off x="11266438" y="176213"/>
+            <a:ext cx="425964" cy="180975"/>
           </a:xfrm>
           <a:prstGeom prst="rect">
             <a:avLst/>
@@ -15858,8 +15858,8 @@
         </p:nvSpPr>
         <p:spPr>
           <a:xfrm>
-            <a:off x="507950" y="180975"/>
-            <a:ext cx="702097" cy="171450"/>
+            <a:off x="507950" y="176213"/>
+            <a:ext cx="741718" cy="180975"/>
           </a:xfrm>
           <a:prstGeom prst="rect">
             <a:avLst/>
@@ -15897,8 +15897,8 @@
         </p:nvSpPr>
         <p:spPr>
           <a:xfrm>
-            <a:off x="1481733" y="166688"/>
-            <a:ext cx="1959191" cy="200025"/>
+            <a:off x="1520577" y="166688"/>
+            <a:ext cx="2029477" cy="200025"/>
           </a:xfrm>
           <a:prstGeom prst="rect">
             <a:avLst/>
@@ -15936,8 +15936,8 @@
         </p:nvSpPr>
         <p:spPr>
           <a:xfrm>
-            <a:off x="11322397" y="180975"/>
-            <a:ext cx="368885" cy="171450"/>
+            <a:off x="11265843" y="176213"/>
+            <a:ext cx="426571" cy="180975"/>
           </a:xfrm>
           <a:prstGeom prst="rect">
             <a:avLst/>
@@ -16005,7 +16005,7 @@
         </p:nvSpPr>
         <p:spPr>
           <a:xfrm>
-            <a:off x="609600" y="984796"/>
+            <a:off x="609600" y="1181695"/>
             <a:ext cx="11192256" cy="200025"/>
           </a:xfrm>
           <a:prstGeom prst="rect">
@@ -16044,12 +16044,12 @@
         </p:nvSpPr>
         <p:spPr>
           <a:xfrm>
-            <a:off x="609600" y="1184821"/>
-            <a:ext cx="10972800" cy="1149251"/>
+            <a:off x="609600" y="1381720"/>
+            <a:ext cx="10972800" cy="784175"/>
           </a:xfrm>
           <a:prstGeom prst="roundRect">
             <a:avLst>
-              <a:gd name="adj" fmla="val 9946"/>
+              <a:gd name="adj" fmla="val 14576"/>
             </a:avLst>
           </a:prstGeom>
           <a:solidFill>
@@ -16080,8 +16080,8 @@
         </p:nvSpPr>
         <p:spPr>
           <a:xfrm>
-            <a:off x="933450" y="1394371"/>
-            <a:ext cx="10531602" cy="730151"/>
+            <a:off x="933450" y="1591270"/>
+            <a:ext cx="10531602" cy="365075"/>
           </a:xfrm>
           <a:prstGeom prst="rect">
             <a:avLst/>
@@ -16122,7 +16122,7 @@
         </p:nvSpPr>
         <p:spPr>
           <a:xfrm>
-            <a:off x="609600" y="2486471"/>
+            <a:off x="609600" y="2318296"/>
             <a:ext cx="11192256" cy="200025"/>
           </a:xfrm>
           <a:prstGeom prst="rect">
@@ -16164,12 +16164,12 @@
         </p:nvSpPr>
         <p:spPr>
           <a:xfrm>
-            <a:off x="609600" y="2787997"/>
-            <a:ext cx="10972800" cy="935236"/>
+            <a:off x="609600" y="2619821"/>
+            <a:ext cx="10972800" cy="925711"/>
           </a:xfrm>
           <a:prstGeom prst="roundRect">
             <a:avLst>
-              <a:gd name="adj" fmla="val 6790"/>
+              <a:gd name="adj" fmla="val 6860"/>
             </a:avLst>
           </a:prstGeom>
           <a:solidFill>
@@ -16200,7 +16200,7 @@
         </p:nvSpPr>
         <p:spPr>
           <a:xfrm>
-            <a:off x="822275" y="2949922"/>
+            <a:off x="822275" y="2781746"/>
             <a:ext cx="297841" cy="350490"/>
           </a:xfrm>
           <a:prstGeom prst="rect">
@@ -16242,8 +16242,8 @@
         </p:nvSpPr>
         <p:spPr>
           <a:xfrm>
-            <a:off x="1279327" y="2949922"/>
-            <a:ext cx="3237235" cy="284411"/>
+            <a:off x="1279327" y="2781746"/>
+            <a:ext cx="3332568" cy="284411"/>
           </a:xfrm>
           <a:prstGeom prst="rect">
             <a:avLst/>
@@ -16284,8 +16284,8 @@
         </p:nvSpPr>
         <p:spPr>
           <a:xfrm>
-            <a:off x="1279327" y="3285083"/>
-            <a:ext cx="3237235" cy="276225"/>
+            <a:off x="1279327" y="3116907"/>
+            <a:ext cx="3332568" cy="266700"/>
           </a:xfrm>
           <a:prstGeom prst="rect">
             <a:avLst/>
@@ -16326,12 +16326,12 @@
         </p:nvSpPr>
         <p:spPr>
           <a:xfrm>
-            <a:off x="609600" y="3875633"/>
-            <a:ext cx="10972800" cy="935236"/>
+            <a:off x="609600" y="3697932"/>
+            <a:ext cx="10972800" cy="925711"/>
           </a:xfrm>
           <a:prstGeom prst="roundRect">
             <a:avLst>
-              <a:gd name="adj" fmla="val 6790"/>
+              <a:gd name="adj" fmla="val 6860"/>
             </a:avLst>
           </a:prstGeom>
           <a:solidFill>
@@ -16362,7 +16362,7 @@
         </p:nvSpPr>
         <p:spPr>
           <a:xfrm>
-            <a:off x="822275" y="4037558"/>
+            <a:off x="822275" y="3859857"/>
             <a:ext cx="297841" cy="350490"/>
           </a:xfrm>
           <a:prstGeom prst="rect">
@@ -16404,8 +16404,8 @@
         </p:nvSpPr>
         <p:spPr>
           <a:xfrm>
-            <a:off x="1279327" y="4037558"/>
-            <a:ext cx="5065571" cy="284411"/>
+            <a:off x="1279327" y="3859857"/>
+            <a:ext cx="5293429" cy="284411"/>
           </a:xfrm>
           <a:prstGeom prst="rect">
             <a:avLst/>
@@ -16446,8 +16446,8 @@
         </p:nvSpPr>
         <p:spPr>
           <a:xfrm>
-            <a:off x="1279327" y="4372719"/>
-            <a:ext cx="5065571" cy="276225"/>
+            <a:off x="1279327" y="4195018"/>
+            <a:ext cx="5293429" cy="266700"/>
           </a:xfrm>
           <a:prstGeom prst="rect">
             <a:avLst/>
@@ -16488,12 +16488,12 @@
         </p:nvSpPr>
         <p:spPr>
           <a:xfrm>
-            <a:off x="609600" y="4963269"/>
-            <a:ext cx="10972800" cy="935236"/>
+            <a:off x="609600" y="4776043"/>
+            <a:ext cx="10972800" cy="925711"/>
           </a:xfrm>
           <a:prstGeom prst="roundRect">
             <a:avLst>
-              <a:gd name="adj" fmla="val 6790"/>
+              <a:gd name="adj" fmla="val 6860"/>
             </a:avLst>
           </a:prstGeom>
           <a:solidFill>
@@ -16524,7 +16524,7 @@
         </p:nvSpPr>
         <p:spPr>
           <a:xfrm>
-            <a:off x="822275" y="5125194"/>
+            <a:off x="822275" y="4937968"/>
             <a:ext cx="297841" cy="350490"/>
           </a:xfrm>
           <a:prstGeom prst="rect">
@@ -16566,8 +16566,8 @@
         </p:nvSpPr>
         <p:spPr>
           <a:xfrm>
-            <a:off x="1279327" y="5125194"/>
-            <a:ext cx="5221929" cy="284411"/>
+            <a:off x="1279327" y="4937968"/>
+            <a:ext cx="5422919" cy="284411"/>
           </a:xfrm>
           <a:prstGeom prst="rect">
             <a:avLst/>
@@ -16608,8 +16608,8 @@
         </p:nvSpPr>
         <p:spPr>
           <a:xfrm>
-            <a:off x="1279327" y="5460355"/>
-            <a:ext cx="5221929" cy="276225"/>
+            <a:off x="1279327" y="5273129"/>
+            <a:ext cx="5422919" cy="266700"/>
           </a:xfrm>
           <a:prstGeom prst="rect">
             <a:avLst/>
@@ -16951,7 +16951,7 @@
       </p:sp>
       <p:pic>
         <p:nvPicPr>
-          <p:cNvPr id="10" name="Image 0" descr="/var/folders/6c/210dcgxn4gz5sm71vld2cy1h0000gn/T/tmp.LHO6BoqOp1/img/fujin.png">    </p:cNvPr>
+          <p:cNvPr id="10" name="Image 0" descr="/var/folders/6c/210dcgxn4gz5sm71vld2cy1h0000gn/T/tmp.kuKuqUEQz8/img/fujin.png">    </p:cNvPr>
           <p:cNvPicPr>
             <a:picLocks noChangeAspect="1"/>
           </p:cNvPicPr>
@@ -17131,7 +17131,7 @@
       </p:sp>
       <p:pic>
         <p:nvPicPr>
-          <p:cNvPr id="15" name="Image 1" descr="/var/folders/6c/210dcgxn4gz5sm71vld2cy1h0000gn/T/tmp.LHO6BoqOp1/img/huadian.png">    </p:cNvPr>
+          <p:cNvPr id="15" name="Image 1" descr="/var/folders/6c/210dcgxn4gz5sm71vld2cy1h0000gn/T/tmp.kuKuqUEQz8/img/huadian.png">    </p:cNvPr>
           <p:cNvPicPr>
             <a:picLocks noChangeAspect="1"/>
           </p:cNvPicPr>
@@ -18870,7 +18870,7 @@
       </p:sp>
       <p:pic>
         <p:nvPicPr>
-          <p:cNvPr id="10" name="Image 0" descr="/var/folders/6c/210dcgxn4gz5sm71vld2cy1h0000gn/T/tmp.LHO6BoqOp1/img/wenjudian.png">    </p:cNvPr>
+          <p:cNvPr id="10" name="Image 0" descr="/var/folders/6c/210dcgxn4gz5sm71vld2cy1h0000gn/T/tmp.kuKuqUEQz8/img/wenjudian.png">    </p:cNvPr>
           <p:cNvPicPr>
             <a:picLocks noChangeAspect="1"/>
           </p:cNvPicPr>
@@ -19050,7 +19050,7 @@
       </p:sp>
       <p:pic>
         <p:nvPicPr>
-          <p:cNvPr id="15" name="Image 1" descr="/var/folders/6c/210dcgxn4gz5sm71vld2cy1h0000gn/T/tmp.LHO6BoqOp1/img/jiajudian.png">    </p:cNvPr>
+          <p:cNvPr id="15" name="Image 1" descr="/var/folders/6c/210dcgxn4gz5sm71vld2cy1h0000gn/T/tmp.kuKuqUEQz8/img/jiajudian.png">    </p:cNvPr>
           <p:cNvPicPr>
             <a:picLocks noChangeAspect="1"/>
           </p:cNvPicPr>
